--- a/data/09_internal_training/training_12.pptx
+++ b/data/09_internal_training/training_12.pptx
@@ -3140,7 +3140,29 @@
           <a:p/>
           <a:p>
             <a:r>
-              <a:t>风险管理部认为，云计算 行业仍然面临若干</a:t>
+              <a:t>通际名联网络有限公司 是中国 机器人 行业的重要企业之一。</a:t>
+            </a:r>
+          </a:p>
+          <a:p>
+            <a:r>
+              <a:t>根据华辰资本 资产配置委员会 的研究，该公司成立于 2016 年，</a:t>
+            </a:r>
+          </a:p>
+          <a:p>
+            <a:r>
+              <a:t>目前员工规模约 3310 人。公司近年来持续加大研发投入，</a:t>
+            </a:r>
+          </a:p>
+          <a:p>
+            <a:r>
+              <a:t>在核心技术方面形成了较强的竞争壁垒。</a:t>
+            </a:r>
+          </a:p>
+          <a:p/>
+          <a:p/>
+          <a:p>
+            <a:r>
+              <a:t>风险管理部认为，半导体 行业仍然面临若干</a:t>
             </a:r>
           </a:p>
           <a:p>
@@ -3157,34 +3179,17 @@
           <a:p/>
           <a:p>
             <a:r>
-              <a:t>根据内部财务模型测算，精芯科技有限公司 在未来三年</a:t>
-            </a:r>
-          </a:p>
-          <a:p>
-            <a:r>
-              <a:t>收入复合增长率预计可达到 31% 左右。</a:t>
-            </a:r>
-          </a:p>
-          <a:p>
-            <a:r>
-              <a:t>该预测基于行业需求增长以及公司产能扩张计划。</a:t>
-            </a:r>
-          </a:p>
-          <a:p/>
-          <a:p/>
-          <a:p>
-            <a:r>
-              <a:t>根据内部财务模型测算，创亿信息有限公司 在未来三年</a:t>
-            </a:r>
-          </a:p>
-          <a:p>
-            <a:r>
-              <a:t>收入复合增长率预计可达到 35% 左右。</a:t>
-            </a:r>
-          </a:p>
-          <a:p>
-            <a:r>
-              <a:t>该预测基于行业需求增长以及公司产能扩张计划。</a:t>
+              <a:t>从产业链角度看，半导体 行业主要由上游设备厂商、</a:t>
+            </a:r>
+          </a:p>
+          <a:p>
+            <a:r>
+              <a:t>中游平台企业以及下游应用厂商组成。</a:t>
+            </a:r>
+          </a:p>
+          <a:p>
+            <a:r>
+              <a:t>精芯信息有限公司 主要位于产业链的 下游 环节。</a:t>
             </a:r>
           </a:p>
           <a:p/>
@@ -3246,51 +3251,61 @@
           <a:p/>
           <a:p>
             <a:r>
-              <a:t>从产业链角度看，新能源 行业主要由上游设备厂商、</a:t>
-            </a:r>
-          </a:p>
-          <a:p>
-            <a:r>
-              <a:t>中游平台企业以及下游应用厂商组成。</a:t>
-            </a:r>
-          </a:p>
-          <a:p>
-            <a:r>
-              <a:t>快讯网络有限公司 主要位于产业链的 上游 环节。</a:t>
-            </a:r>
-          </a:p>
-          <a:p/>
-          <a:p/>
-          <a:p>
-            <a:r>
-              <a:t>华辰资本旗下的 HC Energy Transition Fund 在最近的资产配置会议中</a:t>
-            </a:r>
-          </a:p>
-          <a:p>
-            <a:r>
-              <a:t>讨论了 新能源 行业的投资机会，并对 九方信息有限公司</a:t>
-            </a:r>
-          </a:p>
-          <a:p>
-            <a:r>
-              <a:t>进行了重点评估。</a:t>
-            </a:r>
-          </a:p>
-          <a:p/>
-          <a:p/>
-          <a:p>
-            <a:r>
-              <a:t>风险管理部认为，半导体 行业仍然面临若干</a:t>
-            </a:r>
-          </a:p>
-          <a:p>
-            <a:r>
-              <a:t>不确定性因素，包括技术迭代风险、政策变化、</a:t>
-            </a:r>
-          </a:p>
-          <a:p>
-            <a:r>
-              <a:t>以及市场竞争加剧等问题。</a:t>
+              <a:t>精芯信息有限公司 是中国 半导体 行业的重要企业之一。</a:t>
+            </a:r>
+          </a:p>
+          <a:p>
+            <a:r>
+              <a:t>根据华辰资本 投资委员会 的研究，该公司成立于 2019 年，</a:t>
+            </a:r>
+          </a:p>
+          <a:p>
+            <a:r>
+              <a:t>目前员工规模约 5163 人。公司近年来持续加大研发投入，</a:t>
+            </a:r>
+          </a:p>
+          <a:p>
+            <a:r>
+              <a:t>在核心技术方面形成了较强的竞争壁垒。</a:t>
+            </a:r>
+          </a:p>
+          <a:p/>
+          <a:p/>
+          <a:p>
+            <a:r>
+              <a:t>昊嘉科技有限公司 是中国 医疗科技 行业的重要企业之一。</a:t>
+            </a:r>
+          </a:p>
+          <a:p>
+            <a:r>
+              <a:t>根据华辰资本 风险管理部 的研究，该公司成立于 2006 年，</a:t>
+            </a:r>
+          </a:p>
+          <a:p>
+            <a:r>
+              <a:t>目前员工规模约 7977 人。公司近年来持续加大研发投入，</a:t>
+            </a:r>
+          </a:p>
+          <a:p>
+            <a:r>
+              <a:t>在核心技术方面形成了较强的竞争壁垒。</a:t>
+            </a:r>
+          </a:p>
+          <a:p/>
+          <a:p/>
+          <a:p>
+            <a:r>
+              <a:t>根据内部财务模型测算，恩悌网络有限公司 在未来三年</a:t>
+            </a:r>
+          </a:p>
+          <a:p>
+            <a:r>
+              <a:t>收入复合增长率预计可达到 34% 左右。</a:t>
+            </a:r>
+          </a:p>
+          <a:p>
+            <a:r>
+              <a:t>该预测基于行业需求增长以及公司产能扩张计划。</a:t>
             </a:r>
           </a:p>
           <a:p/>
@@ -3352,24 +3367,7 @@
           <a:p/>
           <a:p>
             <a:r>
-              <a:t>华辰资本旗下的 HC AI Innovation Fund 在最近的资产配置会议中</a:t>
-            </a:r>
-          </a:p>
-          <a:p>
-            <a:r>
-              <a:t>讨论了 新能源 行业的投资机会，并对 鸿睿思博网络有限公司</a:t>
-            </a:r>
-          </a:p>
-          <a:p>
-            <a:r>
-              <a:t>进行了重点评估。</a:t>
-            </a:r>
-          </a:p>
-          <a:p/>
-          <a:p/>
-          <a:p>
-            <a:r>
-              <a:t>从产业链角度看，云计算 行业主要由上游设备厂商、</a:t>
+              <a:t>从产业链角度看，半导体 行业主要由上游设备厂商、</a:t>
             </a:r>
           </a:p>
           <a:p>
@@ -3379,29 +3377,41 @@
           </a:p>
           <a:p>
             <a:r>
-              <a:t>立信电子网络有限公司 主要位于产业链的 中游 环节。</a:t>
-            </a:r>
-          </a:p>
-          <a:p/>
-          <a:p/>
-          <a:p>
-            <a:r>
-              <a:t>鸿睿思博网络有限公司 是中国 新能源 行业的重要企业之一。</a:t>
-            </a:r>
-          </a:p>
-          <a:p>
-            <a:r>
-              <a:t>根据华辰资本 风险管理部 的研究，该公司成立于 2015 年，</a:t>
-            </a:r>
-          </a:p>
-          <a:p>
-            <a:r>
-              <a:t>目前员工规模约 1240 人。公司近年来持续加大研发投入，</a:t>
-            </a:r>
-          </a:p>
-          <a:p>
-            <a:r>
-              <a:t>在核心技术方面形成了较强的竞争壁垒。</a:t>
+              <a:t>信诚致远网络有限公司 主要位于产业链的 中游 环节。</a:t>
+            </a:r>
+          </a:p>
+          <a:p/>
+          <a:p/>
+          <a:p>
+            <a:r>
+              <a:t>根据内部财务模型测算，明腾传媒有限公司 在未来三年</a:t>
+            </a:r>
+          </a:p>
+          <a:p>
+            <a:r>
+              <a:t>收入复合增长率预计可达到 25% 左右。</a:t>
+            </a:r>
+          </a:p>
+          <a:p>
+            <a:r>
+              <a:t>该预测基于行业需求增长以及公司产能扩张计划。</a:t>
+            </a:r>
+          </a:p>
+          <a:p/>
+          <a:p/>
+          <a:p>
+            <a:r>
+              <a:t>根据内部财务模型测算，惠派国际公司科技有限公司 在未来三年</a:t>
+            </a:r>
+          </a:p>
+          <a:p>
+            <a:r>
+              <a:t>收入复合增长率预计可达到 29% 左右。</a:t>
+            </a:r>
+          </a:p>
+          <a:p>
+            <a:r>
+              <a:t>该预测基于行业需求增长以及公司产能扩张计划。</a:t>
             </a:r>
           </a:p>
           <a:p/>
@@ -3463,56 +3473,51 @@
           <a:p/>
           <a:p>
             <a:r>
-              <a:t>兰金电子网络有限公司 是中国 消费科技 行业的重要企业之一。</a:t>
-            </a:r>
-          </a:p>
-          <a:p>
-            <a:r>
-              <a:t>根据华辰资本 投资委员会 的研究，该公司成立于 2006 年，</a:t>
-            </a:r>
-          </a:p>
-          <a:p>
-            <a:r>
-              <a:t>目前员工规模约 4629 人。公司近年来持续加大研发投入，</a:t>
-            </a:r>
-          </a:p>
-          <a:p>
-            <a:r>
-              <a:t>在核心技术方面形成了较强的竞争壁垒。</a:t>
-            </a:r>
-          </a:p>
-          <a:p/>
-          <a:p/>
-          <a:p>
-            <a:r>
-              <a:t>风险管理部认为，半导体 行业仍然面临若干</a:t>
-            </a:r>
-          </a:p>
-          <a:p>
-            <a:r>
-              <a:t>不确定性因素，包括技术迭代风险、政策变化、</a:t>
-            </a:r>
-          </a:p>
-          <a:p>
-            <a:r>
-              <a:t>以及市场竞争加剧等问题。</a:t>
-            </a:r>
-          </a:p>
-          <a:p/>
-          <a:p/>
-          <a:p>
-            <a:r>
-              <a:t>根据内部财务模型测算，快讯网络有限公司 在未来三年</a:t>
-            </a:r>
-          </a:p>
-          <a:p>
-            <a:r>
-              <a:t>收入复合增长率预计可达到 20% 左右。</a:t>
+              <a:t>根据内部财务模型测算，飞海科技传媒有限公司 在未来三年</a:t>
+            </a:r>
+          </a:p>
+          <a:p>
+            <a:r>
+              <a:t>收入复合增长率预计可达到 30% 左右。</a:t>
             </a:r>
           </a:p>
           <a:p>
             <a:r>
               <a:t>该预测基于行业需求增长以及公司产能扩张计划。</a:t>
+            </a:r>
+          </a:p>
+          <a:p/>
+          <a:p/>
+          <a:p>
+            <a:r>
+              <a:t>华辰资本旗下的 HC Global Macro Fund 在最近的资产配置会议中</a:t>
+            </a:r>
+          </a:p>
+          <a:p>
+            <a:r>
+              <a:t>讨论了 消费科技 行业的投资机会，并对 天开科技有限公司</a:t>
+            </a:r>
+          </a:p>
+          <a:p>
+            <a:r>
+              <a:t>进行了重点评估。</a:t>
+            </a:r>
+          </a:p>
+          <a:p/>
+          <a:p/>
+          <a:p>
+            <a:r>
+              <a:t>华辰资本旗下的 HC Global Macro Fund 在最近的资产配置会议中</a:t>
+            </a:r>
+          </a:p>
+          <a:p>
+            <a:r>
+              <a:t>讨论了 消费科技 行业的投资机会，并对 华泰通安传媒有限公司</a:t>
+            </a:r>
+          </a:p>
+          <a:p>
+            <a:r>
+              <a:t>进行了重点评估。</a:t>
             </a:r>
           </a:p>
           <a:p/>
@@ -3574,56 +3579,56 @@
           <a:p/>
           <a:p>
             <a:r>
-              <a:t>风险管理部认为，消费科技 行业仍然面临若干</a:t>
-            </a:r>
-          </a:p>
-          <a:p>
-            <a:r>
-              <a:t>不确定性因素，包括技术迭代风险、政策变化、</a:t>
-            </a:r>
-          </a:p>
-          <a:p>
-            <a:r>
-              <a:t>以及市场竞争加剧等问题。</a:t>
-            </a:r>
-          </a:p>
-          <a:p/>
-          <a:p/>
-          <a:p>
-            <a:r>
-              <a:t>华辰资本旗下的 HC Quant Arbitrage Fund 在最近的资产配置会议中</a:t>
-            </a:r>
-          </a:p>
-          <a:p>
-            <a:r>
-              <a:t>讨论了 半导体 行业的投资机会，并对 华远软件信息有限公司</a:t>
-            </a:r>
-          </a:p>
-          <a:p>
-            <a:r>
-              <a:t>进行了重点评估。</a:t>
-            </a:r>
-          </a:p>
-          <a:p/>
-          <a:p/>
-          <a:p>
-            <a:r>
-              <a:t>精芯科技有限公司 是中国 云计算 行业的重要企业之一。</a:t>
-            </a:r>
-          </a:p>
-          <a:p>
-            <a:r>
-              <a:t>根据华辰资本 资产配置委员会 的研究，该公司成立于 2005 年，</a:t>
-            </a:r>
-          </a:p>
-          <a:p>
-            <a:r>
-              <a:t>目前员工规模约 3520 人。公司近年来持续加大研发投入，</a:t>
+              <a:t>华成育卓传媒有限公司 是中国 人工智能 行业的重要企业之一。</a:t>
+            </a:r>
+          </a:p>
+          <a:p>
+            <a:r>
+              <a:t>根据华辰资本 投资策略部 的研究，该公司成立于 2006 年，</a:t>
+            </a:r>
+          </a:p>
+          <a:p>
+            <a:r>
+              <a:t>目前员工规模约 7579 人。公司近年来持续加大研发投入，</a:t>
             </a:r>
           </a:p>
           <a:p>
             <a:r>
               <a:t>在核心技术方面形成了较强的竞争壁垒。</a:t>
+            </a:r>
+          </a:p>
+          <a:p/>
+          <a:p/>
+          <a:p>
+            <a:r>
+              <a:t>根据内部财务模型测算，华泰通安网络有限公司 在未来三年</a:t>
+            </a:r>
+          </a:p>
+          <a:p>
+            <a:r>
+              <a:t>收入复合增长率预计可达到 11% 左右。</a:t>
+            </a:r>
+          </a:p>
+          <a:p>
+            <a:r>
+              <a:t>该预测基于行业需求增长以及公司产能扩张计划。</a:t>
+            </a:r>
+          </a:p>
+          <a:p/>
+          <a:p/>
+          <a:p>
+            <a:r>
+              <a:t>从产业链角度看，云计算 行业主要由上游设备厂商、</a:t>
+            </a:r>
+          </a:p>
+          <a:p>
+            <a:r>
+              <a:t>中游平台企业以及下游应用厂商组成。</a:t>
+            </a:r>
+          </a:p>
+          <a:p>
+            <a:r>
+              <a:t>信诚致远科技有限公司 主要位于产业链的 上游 环节。</a:t>
             </a:r>
           </a:p>
           <a:p/>
@@ -3685,12 +3690,12 @@
           <a:p/>
           <a:p>
             <a:r>
-              <a:t>根据内部财务模型测算，华远软件信息有限公司 在未来三年</a:t>
-            </a:r>
-          </a:p>
-          <a:p>
-            <a:r>
-              <a:t>收入复合增长率预计可达到 18% 左右。</a:t>
+              <a:t>根据内部财务模型测算，惠派国际公司科技有限公司 在未来三年</a:t>
+            </a:r>
+          </a:p>
+          <a:p>
+            <a:r>
+              <a:t>收入复合增长率预计可达到 35% 左右。</a:t>
             </a:r>
           </a:p>
           <a:p>
@@ -3702,34 +3707,44 @@
           <a:p/>
           <a:p>
             <a:r>
-              <a:t>华辰资本旗下的 HC AI Innovation Fund 在最近的资产配置会议中</a:t>
-            </a:r>
-          </a:p>
-          <a:p>
-            <a:r>
-              <a:t>讨论了 医疗科技 行业的投资机会，并对 创联世纪科技有限公司</a:t>
-            </a:r>
-          </a:p>
-          <a:p>
-            <a:r>
-              <a:t>进行了重点评估。</a:t>
-            </a:r>
-          </a:p>
-          <a:p/>
-          <a:p/>
-          <a:p>
-            <a:r>
-              <a:t>华辰资本旗下的 HC Energy Transition Fund 在最近的资产配置会议中</a:t>
-            </a:r>
-          </a:p>
-          <a:p>
-            <a:r>
-              <a:t>讨论了 医疗科技 行业的投资机会，并对 富罳信息有限公司</a:t>
-            </a:r>
-          </a:p>
-          <a:p>
-            <a:r>
-              <a:t>进行了重点评估。</a:t>
+              <a:t>惠派国际公司科技有限公司 是中国 人工智能 行业的重要企业之一。</a:t>
+            </a:r>
+          </a:p>
+          <a:p>
+            <a:r>
+              <a:t>根据华辰资本 量化研究部 的研究，该公司成立于 2019 年，</a:t>
+            </a:r>
+          </a:p>
+          <a:p>
+            <a:r>
+              <a:t>目前员工规模约 6944 人。公司近年来持续加大研发投入，</a:t>
+            </a:r>
+          </a:p>
+          <a:p>
+            <a:r>
+              <a:t>在核心技术方面形成了较强的竞争壁垒。</a:t>
+            </a:r>
+          </a:p>
+          <a:p/>
+          <a:p/>
+          <a:p>
+            <a:r>
+              <a:t>昊嘉科技有限公司 是中国 医疗科技 行业的重要企业之一。</a:t>
+            </a:r>
+          </a:p>
+          <a:p>
+            <a:r>
+              <a:t>根据华辰资本 风险管理部 的研究，该公司成立于 2006 年，</a:t>
+            </a:r>
+          </a:p>
+          <a:p>
+            <a:r>
+              <a:t>目前员工规模约 7977 人。公司近年来持续加大研发投入，</a:t>
+            </a:r>
+          </a:p>
+          <a:p>
+            <a:r>
+              <a:t>在核心技术方面形成了较强的竞争壁垒。</a:t>
             </a:r>
           </a:p>
           <a:p/>
@@ -3791,34 +3806,34 @@
           <a:p/>
           <a:p>
             <a:r>
-              <a:t>根据内部财务模型测算，浦华众城科技有限公司 在未来三年</a:t>
-            </a:r>
-          </a:p>
-          <a:p>
-            <a:r>
-              <a:t>收入复合增长率预计可达到 15% 左右。</a:t>
-            </a:r>
-          </a:p>
-          <a:p>
-            <a:r>
-              <a:t>该预测基于行业需求增长以及公司产能扩张计划。</a:t>
-            </a:r>
-          </a:p>
-          <a:p/>
-          <a:p/>
-          <a:p>
-            <a:r>
-              <a:t>和泰科技有限公司 是中国 人工智能 行业的重要企业之一。</a:t>
-            </a:r>
-          </a:p>
-          <a:p>
-            <a:r>
-              <a:t>根据华辰资本 投资策略部 的研究，该公司成立于 2008 年，</a:t>
-            </a:r>
-          </a:p>
-          <a:p>
-            <a:r>
-              <a:t>目前员工规模约 6443 人。公司近年来持续加大研发投入，</a:t>
+              <a:t>风险管理部认为，半导体 行业仍然面临若干</a:t>
+            </a:r>
+          </a:p>
+          <a:p>
+            <a:r>
+              <a:t>不确定性因素，包括技术迭代风险、政策变化、</a:t>
+            </a:r>
+          </a:p>
+          <a:p>
+            <a:r>
+              <a:t>以及市场竞争加剧等问题。</a:t>
+            </a:r>
+          </a:p>
+          <a:p/>
+          <a:p/>
+          <a:p>
+            <a:r>
+              <a:t>联软科技有限公司 是中国 消费科技 行业的重要企业之一。</a:t>
+            </a:r>
+          </a:p>
+          <a:p>
+            <a:r>
+              <a:t>根据华辰资本 资产配置委员会 的研究，该公司成立于 2009 年，</a:t>
+            </a:r>
+          </a:p>
+          <a:p>
+            <a:r>
+              <a:t>目前员工规模约 7080 人。公司近年来持续加大研发投入，</a:t>
             </a:r>
           </a:p>
           <a:p>
@@ -3830,17 +3845,17 @@
           <a:p/>
           <a:p>
             <a:r>
-              <a:t>风险管理部认为，半导体 行业仍然面临若干</a:t>
-            </a:r>
-          </a:p>
-          <a:p>
-            <a:r>
-              <a:t>不确定性因素，包括技术迭代风险、政策变化、</a:t>
-            </a:r>
-          </a:p>
-          <a:p>
-            <a:r>
-              <a:t>以及市场竞争加剧等问题。</a:t>
+              <a:t>从产业链角度看，消费科技 行业主要由上游设备厂商、</a:t>
+            </a:r>
+          </a:p>
+          <a:p>
+            <a:r>
+              <a:t>中游平台企业以及下游应用厂商组成。</a:t>
+            </a:r>
+          </a:p>
+          <a:p>
+            <a:r>
+              <a:t>鑫博腾飞信息有限公司 主要位于产业链的 中游 环节。</a:t>
             </a:r>
           </a:p>
           <a:p/>
@@ -3902,51 +3917,56 @@
           <a:p/>
           <a:p>
             <a:r>
-              <a:t>根据内部财务模型测算，和泰传媒有限公司 在未来三年</a:t>
-            </a:r>
-          </a:p>
-          <a:p>
-            <a:r>
-              <a:t>收入复合增长率预计可达到 35% 左右。</a:t>
-            </a:r>
-          </a:p>
-          <a:p>
-            <a:r>
-              <a:t>该预测基于行业需求增长以及公司产能扩张计划。</a:t>
-            </a:r>
-          </a:p>
-          <a:p/>
-          <a:p/>
-          <a:p>
-            <a:r>
-              <a:t>从产业链角度看，云计算 行业主要由上游设备厂商、</a:t>
-            </a:r>
-          </a:p>
-          <a:p>
-            <a:r>
-              <a:t>中游平台企业以及下游应用厂商组成。</a:t>
-            </a:r>
-          </a:p>
-          <a:p>
-            <a:r>
-              <a:t>创亿网络有限公司 主要位于产业链的 下游 环节。</a:t>
-            </a:r>
-          </a:p>
-          <a:p/>
-          <a:p/>
-          <a:p>
-            <a:r>
-              <a:t>东方峻景网络有限公司 是中国 机器人 行业的重要企业之一。</a:t>
-            </a:r>
-          </a:p>
-          <a:p>
-            <a:r>
-              <a:t>根据华辰资本 投资策略部 的研究，该公司成立于 2020 年，</a:t>
-            </a:r>
-          </a:p>
-          <a:p>
-            <a:r>
-              <a:t>目前员工规模约 7859 人。公司近年来持续加大研发投入，</a:t>
+              <a:t>华辰资本旗下的 HC Quant Arbitrage Fund 在最近的资产配置会议中</a:t>
+            </a:r>
+          </a:p>
+          <a:p>
+            <a:r>
+              <a:t>讨论了 新能源 行业的投资机会，并对 富罳网络有限公司</a:t>
+            </a:r>
+          </a:p>
+          <a:p>
+            <a:r>
+              <a:t>进行了重点评估。</a:t>
+            </a:r>
+          </a:p>
+          <a:p/>
+          <a:p/>
+          <a:p>
+            <a:r>
+              <a:t>华成育卓传媒有限公司 是中国 人工智能 行业的重要企业之一。</a:t>
+            </a:r>
+          </a:p>
+          <a:p>
+            <a:r>
+              <a:t>根据华辰资本 资产配置委员会 的研究，该公司成立于 2006 年，</a:t>
+            </a:r>
+          </a:p>
+          <a:p>
+            <a:r>
+              <a:t>目前员工规模约 7579 人。公司近年来持续加大研发投入，</a:t>
+            </a:r>
+          </a:p>
+          <a:p>
+            <a:r>
+              <a:t>在核心技术方面形成了较强的竞争壁垒。</a:t>
+            </a:r>
+          </a:p>
+          <a:p/>
+          <a:p/>
+          <a:p>
+            <a:r>
+              <a:t>戴硕电子网络有限公司 是中国 新能源 行业的重要企业之一。</a:t>
+            </a:r>
+          </a:p>
+          <a:p>
+            <a:r>
+              <a:t>根据华辰资本 量化研究部 的研究，该公司成立于 2016 年，</a:t>
+            </a:r>
+          </a:p>
+          <a:p>
+            <a:r>
+              <a:t>目前员工规模约 2243 人。公司近年来持续加大研发投入，</a:t>
             </a:r>
           </a:p>
           <a:p>
@@ -4013,17 +4033,17 @@
           <a:p/>
           <a:p>
             <a:r>
-              <a:t>鸿睿思博信息有限公司 是中国 半导体 行业的重要企业之一。</a:t>
-            </a:r>
-          </a:p>
-          <a:p>
-            <a:r>
-              <a:t>根据华辰资本 投资策略部 的研究，该公司成立于 2015 年，</a:t>
-            </a:r>
-          </a:p>
-          <a:p>
-            <a:r>
-              <a:t>目前员工规模约 1207 人。公司近年来持续加大研发投入，</a:t>
+              <a:t>飞海科技传媒有限公司 是中国 消费科技 行业的重要企业之一。</a:t>
+            </a:r>
+          </a:p>
+          <a:p>
+            <a:r>
+              <a:t>根据华辰资本 投资策略部 的研究，该公司成立于 2016 年，</a:t>
+            </a:r>
+          </a:p>
+          <a:p>
+            <a:r>
+              <a:t>目前员工规模约 2007 人。公司近年来持续加大研发投入，</a:t>
             </a:r>
           </a:p>
           <a:p>
@@ -4035,29 +4055,29 @@
           <a:p/>
           <a:p>
             <a:r>
-              <a:t>根据内部财务模型测算，雨林木风计算机科技有限公司 在未来三年</a:t>
-            </a:r>
-          </a:p>
-          <a:p>
-            <a:r>
-              <a:t>收入复合增长率预计可达到 35% 左右。</a:t>
-            </a:r>
-          </a:p>
-          <a:p>
-            <a:r>
-              <a:t>该预测基于行业需求增长以及公司产能扩张计划。</a:t>
-            </a:r>
-          </a:p>
-          <a:p/>
-          <a:p/>
-          <a:p>
-            <a:r>
-              <a:t>根据内部财务模型测算，昊嘉网络有限公司 在未来三年</a:t>
-            </a:r>
-          </a:p>
-          <a:p>
-            <a:r>
-              <a:t>收入复合增长率预计可达到 23% 左右。</a:t>
+              <a:t>从产业链角度看，人工智能 行业主要由上游设备厂商、</a:t>
+            </a:r>
+          </a:p>
+          <a:p>
+            <a:r>
+              <a:t>中游平台企业以及下游应用厂商组成。</a:t>
+            </a:r>
+          </a:p>
+          <a:p>
+            <a:r>
+              <a:t>新格林耐特网络有限公司 主要位于产业链的 下游 环节。</a:t>
+            </a:r>
+          </a:p>
+          <a:p/>
+          <a:p/>
+          <a:p>
+            <a:r>
+              <a:t>根据内部财务模型测算，明腾传媒有限公司 在未来三年</a:t>
+            </a:r>
+          </a:p>
+          <a:p>
+            <a:r>
+              <a:t>收入复合增长率预计可达到 17% 左右。</a:t>
             </a:r>
           </a:p>
           <a:p>
@@ -4124,41 +4144,29 @@
           <a:p/>
           <a:p>
             <a:r>
-              <a:t>风险管理部认为，新能源 行业仍然面临若干</a:t>
-            </a:r>
-          </a:p>
-          <a:p>
-            <a:r>
-              <a:t>不确定性因素，包括技术迭代风险、政策变化、</a:t>
-            </a:r>
-          </a:p>
-          <a:p>
-            <a:r>
-              <a:t>以及市场竞争加剧等问题。</a:t>
-            </a:r>
-          </a:p>
-          <a:p/>
-          <a:p/>
-          <a:p>
-            <a:r>
-              <a:t>根据内部财务模型测算，浦华众城信息有限公司 在未来三年</a:t>
-            </a:r>
-          </a:p>
-          <a:p>
-            <a:r>
-              <a:t>收入复合增长率预计可达到 31% 左右。</a:t>
-            </a:r>
-          </a:p>
-          <a:p>
-            <a:r>
-              <a:t>该预测基于行业需求增长以及公司产能扩张计划。</a:t>
-            </a:r>
-          </a:p>
-          <a:p/>
-          <a:p/>
-          <a:p>
-            <a:r>
-              <a:t>从产业链角度看，医疗科技 行业主要由上游设备厂商、</a:t>
+              <a:t>华泰通安传媒有限公司 是中国 消费科技 行业的重要企业之一。</a:t>
+            </a:r>
+          </a:p>
+          <a:p>
+            <a:r>
+              <a:t>根据华辰资本 投资委员会 的研究，该公司成立于 2006 年，</a:t>
+            </a:r>
+          </a:p>
+          <a:p>
+            <a:r>
+              <a:t>目前员工规模约 1155 人。公司近年来持续加大研发投入，</a:t>
+            </a:r>
+          </a:p>
+          <a:p>
+            <a:r>
+              <a:t>在核心技术方面形成了较强的竞争壁垒。</a:t>
+            </a:r>
+          </a:p>
+          <a:p/>
+          <a:p/>
+          <a:p>
+            <a:r>
+              <a:t>从产业链角度看，人工智能 行业主要由上游设备厂商、</a:t>
             </a:r>
           </a:p>
           <a:p>
@@ -4168,7 +4176,24 @@
           </a:p>
           <a:p>
             <a:r>
-              <a:t>雨林木风计算机网络有限公司 主要位于产业链的 下游 环节。</a:t>
+              <a:t>新格林耐特网络有限公司 主要位于产业链的 上游 环节。</a:t>
+            </a:r>
+          </a:p>
+          <a:p/>
+          <a:p/>
+          <a:p>
+            <a:r>
+              <a:t>从产业链角度看，消费科技 行业主要由上游设备厂商、</a:t>
+            </a:r>
+          </a:p>
+          <a:p>
+            <a:r>
+              <a:t>中游平台企业以及下游应用厂商组成。</a:t>
+            </a:r>
+          </a:p>
+          <a:p>
+            <a:r>
+              <a:t>联通时科传媒有限公司 主要位于产业链的 下游 环节。</a:t>
             </a:r>
           </a:p>
           <a:p/>
@@ -4230,51 +4255,56 @@
           <a:p/>
           <a:p>
             <a:r>
-              <a:t>根据内部财务模型测算，创汇传媒有限公司 在未来三年</a:t>
-            </a:r>
-          </a:p>
-          <a:p>
-            <a:r>
-              <a:t>收入复合增长率预计可达到 15% 左右。</a:t>
-            </a:r>
-          </a:p>
-          <a:p>
-            <a:r>
-              <a:t>该预测基于行业需求增长以及公司产能扩张计划。</a:t>
-            </a:r>
-          </a:p>
-          <a:p/>
-          <a:p/>
-          <a:p>
-            <a:r>
-              <a:t>华辰资本旗下的 HC AI Innovation Fund 在最近的资产配置会议中</a:t>
-            </a:r>
-          </a:p>
-          <a:p>
-            <a:r>
-              <a:t>讨论了 云计算 行业的投资机会，并对 浦华众城信息有限公司</a:t>
-            </a:r>
-          </a:p>
-          <a:p>
-            <a:r>
-              <a:t>进行了重点评估。</a:t>
-            </a:r>
-          </a:p>
-          <a:p/>
-          <a:p/>
-          <a:p>
-            <a:r>
-              <a:t>华辰资本旗下的 HC Alpha Growth Fund 在最近的资产配置会议中</a:t>
-            </a:r>
-          </a:p>
-          <a:p>
-            <a:r>
-              <a:t>讨论了 机器人 行业的投资机会，并对 济南亿次元网络有限公司</a:t>
-            </a:r>
-          </a:p>
-          <a:p>
-            <a:r>
-              <a:t>进行了重点评估。</a:t>
+              <a:t>方正科技传媒有限公司 是中国 人工智能 行业的重要企业之一。</a:t>
+            </a:r>
+          </a:p>
+          <a:p>
+            <a:r>
+              <a:t>根据华辰资本 投资委员会 的研究，该公司成立于 2019 年，</a:t>
+            </a:r>
+          </a:p>
+          <a:p>
+            <a:r>
+              <a:t>目前员工规模约 2043 人。公司近年来持续加大研发投入，</a:t>
+            </a:r>
+          </a:p>
+          <a:p>
+            <a:r>
+              <a:t>在核心技术方面形成了较强的竞争壁垒。</a:t>
+            </a:r>
+          </a:p>
+          <a:p/>
+          <a:p/>
+          <a:p>
+            <a:r>
+              <a:t>风险管理部认为，云计算 行业仍然面临若干</a:t>
+            </a:r>
+          </a:p>
+          <a:p>
+            <a:r>
+              <a:t>不确定性因素，包括技术迭代风险、政策变化、</a:t>
+            </a:r>
+          </a:p>
+          <a:p>
+            <a:r>
+              <a:t>以及市场竞争加剧等问题。</a:t>
+            </a:r>
+          </a:p>
+          <a:p/>
+          <a:p/>
+          <a:p>
+            <a:r>
+              <a:t>从产业链角度看，人工智能 行业主要由上游设备厂商、</a:t>
+            </a:r>
+          </a:p>
+          <a:p>
+            <a:r>
+              <a:t>中游平台企业以及下游应用厂商组成。</a:t>
+            </a:r>
+          </a:p>
+          <a:p>
+            <a:r>
+              <a:t>新格林耐特网络有限公司 主要位于产业链的 中游 环节。</a:t>
             </a:r>
           </a:p>
           <a:p/>
@@ -4336,24 +4366,29 @@
           <a:p/>
           <a:p>
             <a:r>
-              <a:t>风险管理部认为，医疗科技 行业仍然面临若干</a:t>
-            </a:r>
-          </a:p>
-          <a:p>
-            <a:r>
-              <a:t>不确定性因素，包括技术迭代风险、政策变化、</a:t>
-            </a:r>
-          </a:p>
-          <a:p>
-            <a:r>
-              <a:t>以及市场竞争加剧等问题。</a:t>
-            </a:r>
-          </a:p>
-          <a:p/>
-          <a:p/>
-          <a:p>
-            <a:r>
-              <a:t>从产业链角度看，医疗科技 行业主要由上游设备厂商、</a:t>
+              <a:t>图龙信息传媒有限公司 是中国 机器人 行业的重要企业之一。</a:t>
+            </a:r>
+          </a:p>
+          <a:p>
+            <a:r>
+              <a:t>根据华辰资本 风险管理部 的研究，该公司成立于 2007 年，</a:t>
+            </a:r>
+          </a:p>
+          <a:p>
+            <a:r>
+              <a:t>目前员工规模约 2000 人。公司近年来持续加大研发投入，</a:t>
+            </a:r>
+          </a:p>
+          <a:p>
+            <a:r>
+              <a:t>在核心技术方面形成了较强的竞争壁垒。</a:t>
+            </a:r>
+          </a:p>
+          <a:p/>
+          <a:p/>
+          <a:p>
+            <a:r>
+              <a:t>从产业链角度看，半导体 行业主要由上游设备厂商、</a:t>
             </a:r>
           </a:p>
           <a:p>
@@ -4363,24 +4398,24 @@
           </a:p>
           <a:p>
             <a:r>
-              <a:t>创亿信息有限公司 主要位于产业链的 上游 环节。</a:t>
-            </a:r>
-          </a:p>
-          <a:p/>
-          <a:p/>
-          <a:p>
-            <a:r>
-              <a:t>华辰资本旗下的 HC Energy Transition Fund 在最近的资产配置会议中</a:t>
-            </a:r>
-          </a:p>
-          <a:p>
-            <a:r>
-              <a:t>讨论了 消费科技 行业的投资机会，并对 精芯信息有限公司</a:t>
-            </a:r>
-          </a:p>
-          <a:p>
-            <a:r>
-              <a:t>进行了重点评估。</a:t>
+              <a:t>中建创业科技有限公司 主要位于产业链的 下游 环节。</a:t>
+            </a:r>
+          </a:p>
+          <a:p/>
+          <a:p/>
+          <a:p>
+            <a:r>
+              <a:t>根据内部财务模型测算，九方传媒有限公司 在未来三年</a:t>
+            </a:r>
+          </a:p>
+          <a:p>
+            <a:r>
+              <a:t>收入复合增长率预计可达到 19% 左右。</a:t>
+            </a:r>
+          </a:p>
+          <a:p>
+            <a:r>
+              <a:t>该预测基于行业需求增长以及公司产能扩张计划。</a:t>
             </a:r>
           </a:p>
           <a:p/>
@@ -4442,7 +4477,24 @@
           <a:p/>
           <a:p>
             <a:r>
-              <a:t>风险管理部认为，新能源 行业仍然面临若干</a:t>
+              <a:t>根据内部财务模型测算，惠派国际公司科技有限公司 在未来三年</a:t>
+            </a:r>
+          </a:p>
+          <a:p>
+            <a:r>
+              <a:t>收入复合增长率预计可达到 16% 左右。</a:t>
+            </a:r>
+          </a:p>
+          <a:p>
+            <a:r>
+              <a:t>该预测基于行业需求增长以及公司产能扩张计划。</a:t>
+            </a:r>
+          </a:p>
+          <a:p/>
+          <a:p/>
+          <a:p>
+            <a:r>
+              <a:t>风险管理部认为，人工智能 行业仍然面临若干</a:t>
             </a:r>
           </a:p>
           <a:p>
@@ -4459,39 +4511,17 @@
           <a:p/>
           <a:p>
             <a:r>
-              <a:t>九方信息有限公司 是中国 新能源 行业的重要企业之一。</a:t>
-            </a:r>
-          </a:p>
-          <a:p>
-            <a:r>
-              <a:t>根据华辰资本 投资策略部 的研究，该公司成立于 2011 年，</a:t>
-            </a:r>
-          </a:p>
-          <a:p>
-            <a:r>
-              <a:t>目前员工规模约 6198 人。公司近年来持续加大研发投入，</a:t>
-            </a:r>
-          </a:p>
-          <a:p>
-            <a:r>
-              <a:t>在核心技术方面形成了较强的竞争壁垒。</a:t>
-            </a:r>
-          </a:p>
-          <a:p/>
-          <a:p/>
-          <a:p>
-            <a:r>
-              <a:t>从产业链角度看，医疗科技 行业主要由上游设备厂商、</a:t>
-            </a:r>
-          </a:p>
-          <a:p>
-            <a:r>
-              <a:t>中游平台企业以及下游应用厂商组成。</a:t>
-            </a:r>
-          </a:p>
-          <a:p>
-            <a:r>
-              <a:t>创联世纪科技有限公司 主要位于产业链的 下游 环节。</a:t>
+              <a:t>风险管理部认为，云计算 行业仍然面临若干</a:t>
+            </a:r>
+          </a:p>
+          <a:p>
+            <a:r>
+              <a:t>不确定性因素，包括技术迭代风险、政策变化、</a:t>
+            </a:r>
+          </a:p>
+          <a:p>
+            <a:r>
+              <a:t>以及市场竞争加剧等问题。</a:t>
             </a:r>
           </a:p>
           <a:p/>
@@ -4553,56 +4583,56 @@
           <a:p/>
           <a:p>
             <a:r>
-              <a:t>创亿网络有限公司 是中国 云计算 行业的重要企业之一。</a:t>
-            </a:r>
-          </a:p>
-          <a:p>
-            <a:r>
-              <a:t>根据华辰资本 量化研究部 的研究，该公司成立于 2010 年，</a:t>
-            </a:r>
-          </a:p>
-          <a:p>
-            <a:r>
-              <a:t>目前员工规模约 4041 人。公司近年来持续加大研发投入，</a:t>
+              <a:t>根据内部财务模型测算，巨奥传媒有限公司 在未来三年</a:t>
+            </a:r>
+          </a:p>
+          <a:p>
+            <a:r>
+              <a:t>收入复合增长率预计可达到 35% 左右。</a:t>
+            </a:r>
+          </a:p>
+          <a:p>
+            <a:r>
+              <a:t>该预测基于行业需求增长以及公司产能扩张计划。</a:t>
+            </a:r>
+          </a:p>
+          <a:p/>
+          <a:p/>
+          <a:p>
+            <a:r>
+              <a:t>从产业链角度看，半导体 行业主要由上游设备厂商、</a:t>
+            </a:r>
+          </a:p>
+          <a:p>
+            <a:r>
+              <a:t>中游平台企业以及下游应用厂商组成。</a:t>
+            </a:r>
+          </a:p>
+          <a:p>
+            <a:r>
+              <a:t>华泰通安网络有限公司 主要位于产业链的 上游 环节。</a:t>
+            </a:r>
+          </a:p>
+          <a:p/>
+          <a:p/>
+          <a:p>
+            <a:r>
+              <a:t>飞利信科技有限公司 是中国 人工智能 行业的重要企业之一。</a:t>
+            </a:r>
+          </a:p>
+          <a:p>
+            <a:r>
+              <a:t>根据华辰资本 投资策略部 的研究，该公司成立于 2018 年，</a:t>
+            </a:r>
+          </a:p>
+          <a:p>
+            <a:r>
+              <a:t>目前员工规模约 1801 人。公司近年来持续加大研发投入，</a:t>
             </a:r>
           </a:p>
           <a:p>
             <a:r>
               <a:t>在核心技术方面形成了较强的竞争壁垒。</a:t>
-            </a:r>
-          </a:p>
-          <a:p/>
-          <a:p/>
-          <a:p>
-            <a:r>
-              <a:t>根据内部财务模型测算，精芯信息有限公司 在未来三年</a:t>
-            </a:r>
-          </a:p>
-          <a:p>
-            <a:r>
-              <a:t>收入复合增长率预计可达到 21% 左右。</a:t>
-            </a:r>
-          </a:p>
-          <a:p>
-            <a:r>
-              <a:t>该预测基于行业需求增长以及公司产能扩张计划。</a:t>
-            </a:r>
-          </a:p>
-          <a:p/>
-          <a:p/>
-          <a:p>
-            <a:r>
-              <a:t>华辰资本旗下的 HC Quant Arbitrage Fund 在最近的资产配置会议中</a:t>
-            </a:r>
-          </a:p>
-          <a:p>
-            <a:r>
-              <a:t>讨论了 人工智能 行业的投资机会，并对 信诚致远传媒有限公司</a:t>
-            </a:r>
-          </a:p>
-          <a:p>
-            <a:r>
-              <a:t>进行了重点评估。</a:t>
             </a:r>
           </a:p>
           <a:p/>
@@ -4664,56 +4694,51 @@
           <a:p/>
           <a:p>
             <a:r>
-              <a:t>华辰资本旗下的 HC AI Innovation Fund 在最近的资产配置会议中</a:t>
-            </a:r>
-          </a:p>
-          <a:p>
-            <a:r>
-              <a:t>讨论了 新能源 行业的投资机会，并对 东方峻景传媒有限公司</a:t>
+              <a:t>根据内部财务模型测算，毕博诚信息有限公司 在未来三年</a:t>
+            </a:r>
+          </a:p>
+          <a:p>
+            <a:r>
+              <a:t>收入复合增长率预计可达到 35% 左右。</a:t>
+            </a:r>
+          </a:p>
+          <a:p>
+            <a:r>
+              <a:t>该预测基于行业需求增长以及公司产能扩张计划。</a:t>
+            </a:r>
+          </a:p>
+          <a:p/>
+          <a:p/>
+          <a:p>
+            <a:r>
+              <a:t>根据内部财务模型测算，联软科技有限公司 在未来三年</a:t>
+            </a:r>
+          </a:p>
+          <a:p>
+            <a:r>
+              <a:t>收入复合增长率预计可达到 11% 左右。</a:t>
+            </a:r>
+          </a:p>
+          <a:p>
+            <a:r>
+              <a:t>该预测基于行业需求增长以及公司产能扩张计划。</a:t>
+            </a:r>
+          </a:p>
+          <a:p/>
+          <a:p/>
+          <a:p>
+            <a:r>
+              <a:t>华辰资本旗下的 HC Energy Transition Fund 在最近的资产配置会议中</a:t>
+            </a:r>
+          </a:p>
+          <a:p>
+            <a:r>
+              <a:t>讨论了 医疗科技 行业的投资机会，并对 华成育卓科技有限公司</a:t>
             </a:r>
           </a:p>
           <a:p>
             <a:r>
               <a:t>进行了重点评估。</a:t>
-            </a:r>
-          </a:p>
-          <a:p/>
-          <a:p/>
-          <a:p>
-            <a:r>
-              <a:t>九方信息有限公司 是中国 新能源 行业的重要企业之一。</a:t>
-            </a:r>
-          </a:p>
-          <a:p>
-            <a:r>
-              <a:t>根据华辰资本 量化研究部 的研究，该公司成立于 2011 年，</a:t>
-            </a:r>
-          </a:p>
-          <a:p>
-            <a:r>
-              <a:t>目前员工规模约 6198 人。公司近年来持续加大研发投入，</a:t>
-            </a:r>
-          </a:p>
-          <a:p>
-            <a:r>
-              <a:t>在核心技术方面形成了较强的竞争壁垒。</a:t>
-            </a:r>
-          </a:p>
-          <a:p/>
-          <a:p/>
-          <a:p>
-            <a:r>
-              <a:t>从产业链角度看，机器人 行业主要由上游设备厂商、</a:t>
-            </a:r>
-          </a:p>
-          <a:p>
-            <a:r>
-              <a:t>中游平台企业以及下游应用厂商组成。</a:t>
-            </a:r>
-          </a:p>
-          <a:p>
-            <a:r>
-              <a:t>艾提科信科技有限公司 主要位于产业链的 中游 环节。</a:t>
             </a:r>
           </a:p>
           <a:p/>
